--- a/Last/LEC/05-1_TSML.pptx
+++ b/Last/LEC/05-1_TSML.pptx
@@ -246,7 +246,7 @@
           <a:p>
             <a:fld id="{803A9DE4-6CFD-4732-953B-EF950A6B3001}" type="datetimeFigureOut">
               <a:rPr lang="ru-RU" smtClean="0"/>
-              <a:t>09.04.2026</a:t>
+              <a:t>28.04.2026</a:t>
             </a:fld>
             <a:endParaRPr lang="ru-RU"/>
           </a:p>
@@ -1386,7 +1386,7 @@
           <a:p>
             <a:fld id="{43B237C4-111C-4636-B222-D785A341FF5A}" type="datetimeFigureOut">
               <a:rPr lang="ru-RU" smtClean="0"/>
-              <a:t>09.04.2026</a:t>
+              <a:t>28.04.2026</a:t>
             </a:fld>
             <a:endParaRPr lang="ru-RU"/>
           </a:p>
@@ -1554,7 +1554,7 @@
           <a:p>
             <a:fld id="{43B237C4-111C-4636-B222-D785A341FF5A}" type="datetimeFigureOut">
               <a:rPr lang="ru-RU" smtClean="0"/>
-              <a:t>09.04.2026</a:t>
+              <a:t>28.04.2026</a:t>
             </a:fld>
             <a:endParaRPr lang="ru-RU"/>
           </a:p>
@@ -1732,7 +1732,7 @@
           <a:p>
             <a:fld id="{43B237C4-111C-4636-B222-D785A341FF5A}" type="datetimeFigureOut">
               <a:rPr lang="ru-RU" smtClean="0"/>
-              <a:t>09.04.2026</a:t>
+              <a:t>28.04.2026</a:t>
             </a:fld>
             <a:endParaRPr lang="ru-RU"/>
           </a:p>
@@ -1900,7 +1900,7 @@
           <a:p>
             <a:fld id="{43B237C4-111C-4636-B222-D785A341FF5A}" type="datetimeFigureOut">
               <a:rPr lang="ru-RU" smtClean="0"/>
-              <a:t>09.04.2026</a:t>
+              <a:t>28.04.2026</a:t>
             </a:fld>
             <a:endParaRPr lang="ru-RU"/>
           </a:p>
@@ -2145,7 +2145,7 @@
           <a:p>
             <a:fld id="{43B237C4-111C-4636-B222-D785A341FF5A}" type="datetimeFigureOut">
               <a:rPr lang="ru-RU" smtClean="0"/>
-              <a:t>09.04.2026</a:t>
+              <a:t>28.04.2026</a:t>
             </a:fld>
             <a:endParaRPr lang="ru-RU"/>
           </a:p>
@@ -2374,7 +2374,7 @@
           <a:p>
             <a:fld id="{43B237C4-111C-4636-B222-D785A341FF5A}" type="datetimeFigureOut">
               <a:rPr lang="ru-RU" smtClean="0"/>
-              <a:t>09.04.2026</a:t>
+              <a:t>28.04.2026</a:t>
             </a:fld>
             <a:endParaRPr lang="ru-RU"/>
           </a:p>
@@ -2738,7 +2738,7 @@
           <a:p>
             <a:fld id="{43B237C4-111C-4636-B222-D785A341FF5A}" type="datetimeFigureOut">
               <a:rPr lang="ru-RU" smtClean="0"/>
-              <a:t>09.04.2026</a:t>
+              <a:t>28.04.2026</a:t>
             </a:fld>
             <a:endParaRPr lang="ru-RU"/>
           </a:p>
@@ -2855,7 +2855,7 @@
           <a:p>
             <a:fld id="{43B237C4-111C-4636-B222-D785A341FF5A}" type="datetimeFigureOut">
               <a:rPr lang="ru-RU" smtClean="0"/>
-              <a:t>09.04.2026</a:t>
+              <a:t>28.04.2026</a:t>
             </a:fld>
             <a:endParaRPr lang="ru-RU"/>
           </a:p>
@@ -2950,7 +2950,7 @@
           <a:p>
             <a:fld id="{43B237C4-111C-4636-B222-D785A341FF5A}" type="datetimeFigureOut">
               <a:rPr lang="ru-RU" smtClean="0"/>
-              <a:t>09.04.2026</a:t>
+              <a:t>28.04.2026</a:t>
             </a:fld>
             <a:endParaRPr lang="ru-RU"/>
           </a:p>
@@ -3225,7 +3225,7 @@
           <a:p>
             <a:fld id="{43B237C4-111C-4636-B222-D785A341FF5A}" type="datetimeFigureOut">
               <a:rPr lang="ru-RU" smtClean="0"/>
-              <a:t>09.04.2026</a:t>
+              <a:t>28.04.2026</a:t>
             </a:fld>
             <a:endParaRPr lang="ru-RU"/>
           </a:p>
@@ -3477,7 +3477,7 @@
           <a:p>
             <a:fld id="{43B237C4-111C-4636-B222-D785A341FF5A}" type="datetimeFigureOut">
               <a:rPr lang="ru-RU" smtClean="0"/>
-              <a:t>09.04.2026</a:t>
+              <a:t>28.04.2026</a:t>
             </a:fld>
             <a:endParaRPr lang="ru-RU"/>
           </a:p>
@@ -3688,7 +3688,7 @@
           <a:p>
             <a:fld id="{43B237C4-111C-4636-B222-D785A341FF5A}" type="datetimeFigureOut">
               <a:rPr lang="ru-RU" smtClean="0"/>
-              <a:t>09.04.2026</a:t>
+              <a:t>28.04.2026</a:t>
             </a:fld>
             <a:endParaRPr lang="ru-RU"/>
           </a:p>
@@ -8096,7 +8096,7 @@
         </p:nvGraphicFramePr>
         <p:xfrm>
           <a:off x="228598" y="1401333"/>
-          <a:ext cx="11671666" cy="4494123"/>
+          <a:ext cx="11671666" cy="4576737"/>
         </p:xfrm>
         <a:graphic>
           <a:graphicData uri="http://schemas.openxmlformats.org/drawingml/2006/table">
@@ -14642,6 +14642,150 @@
           </a:fontRef>
         </p:style>
       </p:cxnSp>
+      <p:sp>
+        <p:nvSpPr>
+          <p:cNvPr id="11" name="Прямоугольник 10"/>
+          <p:cNvSpPr/>
+          <p:nvPr/>
+        </p:nvSpPr>
+        <p:spPr>
+          <a:xfrm>
+            <a:off x="306559" y="4232800"/>
+            <a:ext cx="6096000" cy="1200329"/>
+          </a:xfrm>
+          <a:prstGeom prst="rect">
+            <a:avLst/>
+          </a:prstGeom>
+        </p:spPr>
+        <p:txBody>
+          <a:bodyPr>
+            <a:spAutoFit/>
+          </a:bodyPr>
+          <a:lstStyle/>
+          <a:p>
+            <a:r>
+              <a:rPr lang="ru-RU" dirty="0">
+                <a:solidFill>
+                  <a:srgbClr val="000000"/>
+                </a:solidFill>
+                <a:latin typeface="ui-sans-serif"/>
+              </a:rPr>
+              <a:t>Теорема </a:t>
+            </a:r>
+            <a:r>
+              <a:rPr lang="ru-RU" dirty="0" err="1">
+                <a:solidFill>
+                  <a:srgbClr val="000000"/>
+                </a:solidFill>
+                <a:latin typeface="ui-sans-serif"/>
+              </a:rPr>
+              <a:t>Такенса</a:t>
+            </a:r>
+            <a:r>
+              <a:rPr lang="ru-RU" dirty="0">
+                <a:solidFill>
+                  <a:srgbClr val="000000"/>
+                </a:solidFill>
+                <a:latin typeface="ui-sans-serif"/>
+              </a:rPr>
+              <a:t> (</a:t>
+            </a:r>
+            <a:r>
+              <a:rPr lang="ru-RU" dirty="0" err="1">
+                <a:solidFill>
+                  <a:srgbClr val="000000"/>
+                </a:solidFill>
+                <a:latin typeface="ui-sans-serif"/>
+              </a:rPr>
+              <a:t>Takens</a:t>
+            </a:r>
+            <a:r>
+              <a:rPr lang="ru-RU" dirty="0">
+                <a:solidFill>
+                  <a:srgbClr val="000000"/>
+                </a:solidFill>
+                <a:latin typeface="ui-sans-serif"/>
+              </a:rPr>
+              <a:t>' </a:t>
+            </a:r>
+            <a:r>
+              <a:rPr lang="ru-RU" dirty="0" err="1">
+                <a:solidFill>
+                  <a:srgbClr val="000000"/>
+                </a:solidFill>
+                <a:latin typeface="ui-sans-serif"/>
+              </a:rPr>
+              <a:t>Embedding</a:t>
+            </a:r>
+            <a:r>
+              <a:rPr lang="ru-RU" dirty="0">
+                <a:solidFill>
+                  <a:srgbClr val="000000"/>
+                </a:solidFill>
+                <a:latin typeface="ui-sans-serif"/>
+              </a:rPr>
+              <a:t> </a:t>
+            </a:r>
+            <a:r>
+              <a:rPr lang="ru-RU" dirty="0" err="1">
+                <a:solidFill>
+                  <a:srgbClr val="000000"/>
+                </a:solidFill>
+                <a:latin typeface="ui-sans-serif"/>
+              </a:rPr>
+              <a:t>Theorem</a:t>
+            </a:r>
+            <a:r>
+              <a:rPr lang="ru-RU" dirty="0" smtClean="0">
+                <a:solidFill>
+                  <a:srgbClr val="000000"/>
+                </a:solidFill>
+                <a:latin typeface="ui-sans-serif"/>
+              </a:rPr>
+              <a:t>)-</a:t>
+            </a:r>
+            <a:r>
+              <a:rPr lang="ru-RU" dirty="0" smtClean="0">
+                <a:solidFill>
+                  <a:srgbClr val="0D0D0D"/>
+                </a:solidFill>
+                <a:latin typeface="ui-sans-serif"/>
+              </a:rPr>
+              <a:t>динамическая </a:t>
+            </a:r>
+            <a:r>
+              <a:rPr lang="ru-RU" dirty="0">
+                <a:solidFill>
+                  <a:srgbClr val="0D0D0D"/>
+                </a:solidFill>
+                <a:latin typeface="ui-sans-serif"/>
+              </a:rPr>
+              <a:t>система может быть восстановлена по задержкам (лагам) одной переменной</a:t>
+            </a:r>
+            <a:r>
+              <a:rPr lang="ru-RU" dirty="0" smtClean="0">
+                <a:solidFill>
+                  <a:srgbClr val="0D0D0D"/>
+                </a:solidFill>
+                <a:latin typeface="ui-sans-serif"/>
+              </a:rPr>
+              <a:t>.</a:t>
+            </a:r>
+          </a:p>
+          <a:p>
+            <a:r>
+              <a:rPr lang="ru-RU" dirty="0" smtClean="0">
+                <a:solidFill>
+                  <a:srgbClr val="0D0D0D"/>
+                </a:solidFill>
+                <a:latin typeface="ui-sans-serif"/>
+              </a:rPr>
+              <a:t>Лагов должно быть столько чтобы АКФ затухала!</a:t>
+            </a:r>
+            <a:endParaRPr lang="ru-RU" dirty="0"/>
+          </a:p>
+        </p:txBody>
+      </p:sp>
     </p:spTree>
     <p:extLst>
       <p:ext uri="{BB962C8B-B14F-4D97-AF65-F5344CB8AC3E}">
